--- a/chapter4/parts/part-09-best-practices/clip.pptx
+++ b/chapter4/parts/part-09-best-practices/clip.pptx
@@ -4100,7 +4100,7 @@
               </a:defRPr>
             </a:pPr>
             <a:r>
-              <a:t>Chapter 4 — 09 Best Practices</a:t>
+              <a:t>Chapter 4 — Best Practices</a:t>
             </a:r>
           </a:p>
         </p:txBody>
@@ -4259,7 +4259,7 @@
               </a:defRPr>
             </a:pPr>
             <a:r>
-              <a:t>Chapter 4 — 09 Best Practices</a:t>
+              <a:t>Chapter 4 — Best Practices</a:t>
             </a:r>
           </a:p>
         </p:txBody>
@@ -4458,7 +4458,7 @@
               </a:defRPr>
             </a:pPr>
             <a:r>
-              <a:t>Chapter 4 — 09 Best Practices</a:t>
+              <a:t>Chapter 4 — Best Practices</a:t>
             </a:r>
           </a:p>
         </p:txBody>
@@ -4617,7 +4617,7 @@
               </a:defRPr>
             </a:pPr>
             <a:r>
-              <a:t>Chapter 4 — 09 Best Practices</a:t>
+              <a:t>Chapter 4 — Best Practices</a:t>
             </a:r>
           </a:p>
         </p:txBody>
@@ -4796,7 +4796,7 @@
               </a:defRPr>
             </a:pPr>
             <a:r>
-              <a:t>Chapter 4 — 09 Best Practices</a:t>
+              <a:t>Chapter 4 — Best Practices</a:t>
             </a:r>
           </a:p>
         </p:txBody>
@@ -4975,7 +4975,7 @@
               </a:defRPr>
             </a:pPr>
             <a:r>
-              <a:t>Chapter 4 — 09 Best Practices</a:t>
+              <a:t>Chapter 4 — Best Practices</a:t>
             </a:r>
           </a:p>
         </p:txBody>
@@ -5154,7 +5154,7 @@
               </a:defRPr>
             </a:pPr>
             <a:r>
-              <a:t>Chapter 4 — 09 Best Practices</a:t>
+              <a:t>Chapter 4 — Best Practices</a:t>
             </a:r>
           </a:p>
         </p:txBody>
@@ -5313,7 +5313,7 @@
               </a:defRPr>
             </a:pPr>
             <a:r>
-              <a:t>Chapter 4 — 09 Best Practices</a:t>
+              <a:t>Chapter 4 — Best Practices</a:t>
             </a:r>
           </a:p>
         </p:txBody>

--- a/chapter4/parts/part-09-best-practices/clip.pptx
+++ b/chapter4/parts/part-09-best-practices/clip.pptx
@@ -4184,10 +4184,12 @@
           </a:bodyPr>
           <a:lstStyle/>
           <a:p>
-            <a:pPr>
+            <a:pPr lvl="0" marL="457200" indent="-228600">
+              <a:buFont typeface="Calibri"/>
               <a:spcAft>
                 <a:spcPts val="1000"/>
               </a:spcAft>
+              <a:buSzPct val="100000"/>
               <a:buChar char="•"/>
               <a:lnSpc>
                 <a:spcPts val="2200"/>
@@ -4204,10 +4206,12 @@
             </a:r>
           </a:p>
           <a:p>
-            <a:pPr>
+            <a:pPr lvl="0" marL="457200" indent="-228600">
+              <a:buFont typeface="Calibri"/>
               <a:spcAft>
                 <a:spcPts val="1000"/>
               </a:spcAft>
+              <a:buSzPct val="100000"/>
               <a:buChar char="•"/>
               <a:lnSpc>
                 <a:spcPts val="2200"/>
@@ -4343,10 +4347,12 @@
           </a:bodyPr>
           <a:lstStyle/>
           <a:p>
-            <a:pPr>
+            <a:pPr lvl="0" marL="457200" indent="-228600">
+              <a:buFont typeface="Calibri"/>
               <a:spcAft>
                 <a:spcPts val="1000"/>
               </a:spcAft>
+              <a:buSzPct val="100000"/>
               <a:buChar char="•"/>
               <a:lnSpc>
                 <a:spcPts val="2200"/>
@@ -4363,10 +4369,12 @@
             </a:r>
           </a:p>
           <a:p>
-            <a:pPr>
+            <a:pPr lvl="0" marL="457200" indent="-228600">
+              <a:buFont typeface="Calibri"/>
               <a:spcAft>
                 <a:spcPts val="1000"/>
               </a:spcAft>
+              <a:buSzPct val="100000"/>
               <a:buChar char="•"/>
               <a:lnSpc>
                 <a:spcPts val="2200"/>
@@ -4383,10 +4391,12 @@
             </a:r>
           </a:p>
           <a:p>
-            <a:pPr>
+            <a:pPr lvl="0" marL="457200" indent="-228600">
+              <a:buFont typeface="Calibri"/>
               <a:spcAft>
                 <a:spcPts val="1000"/>
               </a:spcAft>
+              <a:buSzPct val="100000"/>
               <a:buChar char="•"/>
               <a:lnSpc>
                 <a:spcPts val="2200"/>
@@ -4403,10 +4413,12 @@
             </a:r>
           </a:p>
           <a:p>
-            <a:pPr>
+            <a:pPr lvl="0" marL="457200" indent="-228600">
+              <a:buFont typeface="Calibri"/>
               <a:spcAft>
                 <a:spcPts val="1000"/>
               </a:spcAft>
+              <a:buSzPct val="100000"/>
               <a:buChar char="•"/>
               <a:lnSpc>
                 <a:spcPts val="2200"/>
@@ -4542,10 +4554,12 @@
           </a:bodyPr>
           <a:lstStyle/>
           <a:p>
-            <a:pPr>
+            <a:pPr lvl="0" marL="457200" indent="-228600">
+              <a:buFont typeface="Calibri"/>
               <a:spcAft>
                 <a:spcPts val="1000"/>
               </a:spcAft>
+              <a:buSzPct val="100000"/>
               <a:buChar char="•"/>
               <a:lnSpc>
                 <a:spcPts val="2200"/>
@@ -4562,10 +4576,12 @@
             </a:r>
           </a:p>
           <a:p>
-            <a:pPr>
+            <a:pPr lvl="0" marL="457200" indent="-228600">
+              <a:buFont typeface="Calibri"/>
               <a:spcAft>
                 <a:spcPts val="1000"/>
               </a:spcAft>
+              <a:buSzPct val="100000"/>
               <a:buChar char="•"/>
               <a:lnSpc>
                 <a:spcPts val="2200"/>
@@ -4701,10 +4717,12 @@
           </a:bodyPr>
           <a:lstStyle/>
           <a:p>
-            <a:pPr>
+            <a:pPr lvl="0" marL="457200" indent="-228600">
+              <a:buFont typeface="Calibri"/>
               <a:spcAft>
                 <a:spcPts val="1000"/>
               </a:spcAft>
+              <a:buSzPct val="100000"/>
               <a:buChar char="•"/>
               <a:lnSpc>
                 <a:spcPts val="2200"/>
@@ -4721,10 +4739,12 @@
             </a:r>
           </a:p>
           <a:p>
-            <a:pPr>
+            <a:pPr lvl="0" marL="457200" indent="-228600">
+              <a:buFont typeface="Calibri"/>
               <a:spcAft>
                 <a:spcPts val="1000"/>
               </a:spcAft>
+              <a:buSzPct val="100000"/>
               <a:buChar char="•"/>
               <a:lnSpc>
                 <a:spcPts val="2200"/>
@@ -4741,10 +4761,12 @@
             </a:r>
           </a:p>
           <a:p>
-            <a:pPr>
+            <a:pPr lvl="0" marL="457200" indent="-228600">
+              <a:buFont typeface="Calibri"/>
               <a:spcAft>
                 <a:spcPts val="1000"/>
               </a:spcAft>
+              <a:buSzPct val="100000"/>
               <a:buChar char="•"/>
               <a:lnSpc>
                 <a:spcPts val="2200"/>
@@ -4880,10 +4902,12 @@
           </a:bodyPr>
           <a:lstStyle/>
           <a:p>
-            <a:pPr>
+            <a:pPr lvl="0" marL="457200" indent="-228600">
+              <a:buFont typeface="Calibri"/>
               <a:spcAft>
                 <a:spcPts val="1000"/>
               </a:spcAft>
+              <a:buSzPct val="100000"/>
               <a:buChar char="•"/>
               <a:lnSpc>
                 <a:spcPts val="2200"/>
@@ -4900,10 +4924,12 @@
             </a:r>
           </a:p>
           <a:p>
-            <a:pPr>
+            <a:pPr lvl="0" marL="457200" indent="-228600">
+              <a:buFont typeface="Calibri"/>
               <a:spcAft>
                 <a:spcPts val="1000"/>
               </a:spcAft>
+              <a:buSzPct val="100000"/>
               <a:buChar char="•"/>
               <a:lnSpc>
                 <a:spcPts val="2200"/>
@@ -4920,10 +4946,12 @@
             </a:r>
           </a:p>
           <a:p>
-            <a:pPr>
+            <a:pPr lvl="0" marL="457200" indent="-228600">
+              <a:buFont typeface="Calibri"/>
               <a:spcAft>
                 <a:spcPts val="1000"/>
               </a:spcAft>
+              <a:buSzPct val="100000"/>
               <a:buChar char="•"/>
               <a:lnSpc>
                 <a:spcPts val="2200"/>
@@ -5059,10 +5087,12 @@
           </a:bodyPr>
           <a:lstStyle/>
           <a:p>
-            <a:pPr>
+            <a:pPr lvl="0" marL="457200" indent="-228600">
+              <a:buFont typeface="Calibri"/>
               <a:spcAft>
                 <a:spcPts val="1000"/>
               </a:spcAft>
+              <a:buSzPct val="100000"/>
               <a:buChar char="•"/>
               <a:lnSpc>
                 <a:spcPts val="2200"/>
@@ -5079,10 +5109,12 @@
             </a:r>
           </a:p>
           <a:p>
-            <a:pPr>
+            <a:pPr lvl="0" marL="457200" indent="-228600">
+              <a:buFont typeface="Calibri"/>
               <a:spcAft>
                 <a:spcPts val="1000"/>
               </a:spcAft>
+              <a:buSzPct val="100000"/>
               <a:buChar char="•"/>
               <a:lnSpc>
                 <a:spcPts val="2200"/>
@@ -5099,10 +5131,12 @@
             </a:r>
           </a:p>
           <a:p>
-            <a:pPr>
+            <a:pPr lvl="0" marL="457200" indent="-228600">
+              <a:buFont typeface="Calibri"/>
               <a:spcAft>
                 <a:spcPts val="1000"/>
               </a:spcAft>
+              <a:buSzPct val="100000"/>
               <a:buChar char="•"/>
               <a:lnSpc>
                 <a:spcPts val="2200"/>
@@ -5238,10 +5272,12 @@
           </a:bodyPr>
           <a:lstStyle/>
           <a:p>
-            <a:pPr>
+            <a:pPr lvl="0" marL="457200" indent="-228600">
+              <a:buFont typeface="Calibri"/>
               <a:spcAft>
                 <a:spcPts val="1000"/>
               </a:spcAft>
+              <a:buSzPct val="100000"/>
               <a:buChar char="•"/>
               <a:lnSpc>
                 <a:spcPts val="2200"/>
@@ -5258,10 +5294,12 @@
             </a:r>
           </a:p>
           <a:p>
-            <a:pPr>
+            <a:pPr lvl="0" marL="457200" indent="-228600">
+              <a:buFont typeface="Calibri"/>
               <a:spcAft>
                 <a:spcPts val="1000"/>
               </a:spcAft>
+              <a:buSzPct val="100000"/>
               <a:buChar char="•"/>
               <a:lnSpc>
                 <a:spcPts val="2200"/>
